--- a/cv_history_deck.pptx
+++ b/cv_history_deck.pptx
@@ -3153,8 +3153,8 @@
         </p:nvSpPr>
         <p:spPr>
           <a:xfrm>
-            <a:off x="7162495" y="457200"/>
-            <a:ext cx="4572000" cy="1828800"/>
+            <a:off x="7162495" y="365760"/>
+            <a:ext cx="4572000" cy="2377440"/>
           </a:xfrm>
           <a:prstGeom prst="rect">
             <a:avLst/>
@@ -3173,7 +3173,7 @@
               </a:lnSpc>
             </a:pPr>
             <a:r>
-              <a:rPr sz="18000" b="0" i="0">
+              <a:rPr sz="16000" b="0" i="0">
                 <a:solidFill>
                   <a:srgbClr val="3DCD58"/>
                 </a:solidFill>
@@ -9905,8 +9905,8 @@
         </p:nvSpPr>
         <p:spPr>
           <a:xfrm>
-            <a:off x="8991295" y="822960"/>
-            <a:ext cx="2743200" cy="1828800"/>
+            <a:off x="8991295" y="731520"/>
+            <a:ext cx="2743200" cy="2194560"/>
           </a:xfrm>
           <a:prstGeom prst="rect">
             <a:avLst/>
@@ -9925,7 +9925,7 @@
               </a:lnSpc>
             </a:pPr>
             <a:r>
-              <a:rPr sz="16000" b="0" i="0">
+              <a:rPr sz="14000" b="0" i="0">
                 <a:solidFill>
                   <a:srgbClr val="3DCD58"/>
                 </a:solidFill>
@@ -10071,26 +10071,26 @@
         <p:spPr>
           <a:xfrm>
             <a:off x="548640" y="3657600"/>
-            <a:ext cx="3291840" cy="365760"/>
-          </a:xfrm>
-          <a:prstGeom prst="rect">
-            <a:avLst/>
-          </a:prstGeom>
-          <a:noFill/>
-        </p:spPr>
-        <p:txBody>
-          <a:bodyPr wrap="square" lIns="0" rIns="0" tIns="0" bIns="0" anchor="t">
-            <a:spAutoFit/>
-          </a:bodyPr>
-          <a:lstStyle/>
-          <a:p>
-            <a:pPr algn="l">
-              <a:lnSpc>
-                <a:spcPct val="120000"/>
-              </a:lnSpc>
-            </a:pPr>
-            <a:r>
-              <a:rPr sz="4000" b="0" i="0">
+            <a:ext cx="3291840" cy="640080"/>
+          </a:xfrm>
+          <a:prstGeom prst="rect">
+            <a:avLst/>
+          </a:prstGeom>
+          <a:noFill/>
+        </p:spPr>
+        <p:txBody>
+          <a:bodyPr wrap="square" lIns="0" rIns="0" tIns="0" bIns="0" anchor="t">
+            <a:spAutoFit/>
+          </a:bodyPr>
+          <a:lstStyle/>
+          <a:p>
+            <a:pPr algn="l">
+              <a:lnSpc>
+                <a:spcPct val="120000"/>
+              </a:lnSpc>
+            </a:pPr>
+            <a:r>
+              <a:rPr sz="3600" b="0" i="0">
                 <a:solidFill>
                   <a:srgbClr val="FFFFFF"/>
                 </a:solidFill>
@@ -10223,26 +10223,26 @@
         <p:spPr>
           <a:xfrm>
             <a:off x="4206240" y="3657600"/>
-            <a:ext cx="3291840" cy="365760"/>
-          </a:xfrm>
-          <a:prstGeom prst="rect">
-            <a:avLst/>
-          </a:prstGeom>
-          <a:noFill/>
-        </p:spPr>
-        <p:txBody>
-          <a:bodyPr wrap="square" lIns="0" rIns="0" tIns="0" bIns="0" anchor="t">
-            <a:spAutoFit/>
-          </a:bodyPr>
-          <a:lstStyle/>
-          <a:p>
-            <a:pPr algn="l">
-              <a:lnSpc>
-                <a:spcPct val="120000"/>
-              </a:lnSpc>
-            </a:pPr>
-            <a:r>
-              <a:rPr sz="4000" b="0" i="0">
+            <a:ext cx="3291840" cy="640080"/>
+          </a:xfrm>
+          <a:prstGeom prst="rect">
+            <a:avLst/>
+          </a:prstGeom>
+          <a:noFill/>
+        </p:spPr>
+        <p:txBody>
+          <a:bodyPr wrap="square" lIns="0" rIns="0" tIns="0" bIns="0" anchor="t">
+            <a:spAutoFit/>
+          </a:bodyPr>
+          <a:lstStyle/>
+          <a:p>
+            <a:pPr algn="l">
+              <a:lnSpc>
+                <a:spcPct val="120000"/>
+              </a:lnSpc>
+            </a:pPr>
+            <a:r>
+              <a:rPr sz="3600" b="0" i="0">
                 <a:solidFill>
                   <a:srgbClr val="FFFFFF"/>
                 </a:solidFill>
@@ -10375,26 +10375,26 @@
         <p:spPr>
           <a:xfrm>
             <a:off x="7863840" y="3657600"/>
-            <a:ext cx="3291840" cy="365760"/>
-          </a:xfrm>
-          <a:prstGeom prst="rect">
-            <a:avLst/>
-          </a:prstGeom>
-          <a:noFill/>
-        </p:spPr>
-        <p:txBody>
-          <a:bodyPr wrap="square" lIns="0" rIns="0" tIns="0" bIns="0" anchor="t">
-            <a:spAutoFit/>
-          </a:bodyPr>
-          <a:lstStyle/>
-          <a:p>
-            <a:pPr algn="l">
-              <a:lnSpc>
-                <a:spcPct val="120000"/>
-              </a:lnSpc>
-            </a:pPr>
-            <a:r>
-              <a:rPr sz="4000" b="0" i="0">
+            <a:ext cx="3291840" cy="640080"/>
+          </a:xfrm>
+          <a:prstGeom prst="rect">
+            <a:avLst/>
+          </a:prstGeom>
+          <a:noFill/>
+        </p:spPr>
+        <p:txBody>
+          <a:bodyPr wrap="square" lIns="0" rIns="0" tIns="0" bIns="0" anchor="t">
+            <a:spAutoFit/>
+          </a:bodyPr>
+          <a:lstStyle/>
+          <a:p>
+            <a:pPr algn="l">
+              <a:lnSpc>
+                <a:spcPct val="120000"/>
+              </a:lnSpc>
+            </a:pPr>
+            <a:r>
+              <a:rPr sz="3600" b="0" i="0">
                 <a:solidFill>
                   <a:srgbClr val="3DCD58"/>
                 </a:solidFill>
@@ -10914,7 +10914,7 @@
                 </a:solidFill>
                 <a:latin typeface="Consolas"/>
               </a:rPr>
-              <a:t>02 / 12</a:t>
+              <a:t>02 / 14</a:t>
             </a:r>
           </a:p>
         </p:txBody>
@@ -12696,26 +12696,26 @@
         <p:spPr>
           <a:xfrm>
             <a:off x="548640" y="914400"/>
-            <a:ext cx="6400800" cy="548640"/>
-          </a:xfrm>
-          <a:prstGeom prst="rect">
-            <a:avLst/>
-          </a:prstGeom>
-          <a:noFill/>
-        </p:spPr>
-        <p:txBody>
-          <a:bodyPr wrap="square" lIns="0" rIns="0" tIns="0" bIns="0" anchor="t">
-            <a:spAutoFit/>
-          </a:bodyPr>
-          <a:lstStyle/>
-          <a:p>
-            <a:pPr algn="l">
-              <a:lnSpc>
-                <a:spcPct val="120000"/>
-              </a:lnSpc>
-            </a:pPr>
-            <a:r>
-              <a:rPr sz="20000" b="0" i="0">
+            <a:ext cx="6400800" cy="2743200"/>
+          </a:xfrm>
+          <a:prstGeom prst="rect">
+            <a:avLst/>
+          </a:prstGeom>
+          <a:noFill/>
+        </p:spPr>
+        <p:txBody>
+          <a:bodyPr wrap="square" lIns="0" rIns="0" tIns="0" bIns="0" anchor="t">
+            <a:spAutoFit/>
+          </a:bodyPr>
+          <a:lstStyle/>
+          <a:p>
+            <a:pPr algn="l">
+              <a:lnSpc>
+                <a:spcPct val="120000"/>
+              </a:lnSpc>
+            </a:pPr>
+            <a:r>
+              <a:rPr sz="18000" b="0" i="0">
                 <a:solidFill>
                   <a:srgbClr val="3DCD58"/>
                 </a:solidFill>
@@ -12734,7 +12734,7 @@
         </p:nvSpPr>
         <p:spPr>
           <a:xfrm>
-            <a:off x="548640" y="3840480"/>
+            <a:off x="548640" y="4023360"/>
             <a:ext cx="10058400" cy="457200"/>
           </a:xfrm>
           <a:prstGeom prst="rect">
@@ -12773,7 +12773,7 @@
         </p:nvSpPr>
         <p:spPr>
           <a:xfrm>
-            <a:off x="548640" y="4206240"/>
+            <a:off x="548640" y="4389120"/>
             <a:ext cx="10058400" cy="914400"/>
           </a:xfrm>
           <a:prstGeom prst="rect">
@@ -14913,26 +14913,26 @@
         <p:spPr>
           <a:xfrm>
             <a:off x="548640" y="914400"/>
-            <a:ext cx="6400800" cy="548640"/>
-          </a:xfrm>
-          <a:prstGeom prst="rect">
-            <a:avLst/>
-          </a:prstGeom>
-          <a:noFill/>
-        </p:spPr>
-        <p:txBody>
-          <a:bodyPr wrap="square" lIns="0" rIns="0" tIns="0" bIns="0" anchor="t">
-            <a:spAutoFit/>
-          </a:bodyPr>
-          <a:lstStyle/>
-          <a:p>
-            <a:pPr algn="l">
-              <a:lnSpc>
-                <a:spcPct val="120000"/>
-              </a:lnSpc>
-            </a:pPr>
-            <a:r>
-              <a:rPr sz="20000" b="0" i="0">
+            <a:ext cx="6400800" cy="2743200"/>
+          </a:xfrm>
+          <a:prstGeom prst="rect">
+            <a:avLst/>
+          </a:prstGeom>
+          <a:noFill/>
+        </p:spPr>
+        <p:txBody>
+          <a:bodyPr wrap="square" lIns="0" rIns="0" tIns="0" bIns="0" anchor="t">
+            <a:spAutoFit/>
+          </a:bodyPr>
+          <a:lstStyle/>
+          <a:p>
+            <a:pPr algn="l">
+              <a:lnSpc>
+                <a:spcPct val="120000"/>
+              </a:lnSpc>
+            </a:pPr>
+            <a:r>
+              <a:rPr sz="18000" b="0" i="0">
                 <a:solidFill>
                   <a:srgbClr val="3DCD58"/>
                 </a:solidFill>
@@ -14951,7 +14951,7 @@
         </p:nvSpPr>
         <p:spPr>
           <a:xfrm>
-            <a:off x="548640" y="3840480"/>
+            <a:off x="548640" y="4023360"/>
             <a:ext cx="10058400" cy="457200"/>
           </a:xfrm>
           <a:prstGeom prst="rect">
@@ -14990,7 +14990,7 @@
         </p:nvSpPr>
         <p:spPr>
           <a:xfrm>
-            <a:off x="548640" y="4206240"/>
+            <a:off x="548640" y="4389120"/>
             <a:ext cx="10058400" cy="914400"/>
           </a:xfrm>
           <a:prstGeom prst="rect">
@@ -17130,26 +17130,26 @@
         <p:spPr>
           <a:xfrm>
             <a:off x="548640" y="914400"/>
-            <a:ext cx="6400800" cy="548640"/>
-          </a:xfrm>
-          <a:prstGeom prst="rect">
-            <a:avLst/>
-          </a:prstGeom>
-          <a:noFill/>
-        </p:spPr>
-        <p:txBody>
-          <a:bodyPr wrap="square" lIns="0" rIns="0" tIns="0" bIns="0" anchor="t">
-            <a:spAutoFit/>
-          </a:bodyPr>
-          <a:lstStyle/>
-          <a:p>
-            <a:pPr algn="l">
-              <a:lnSpc>
-                <a:spcPct val="120000"/>
-              </a:lnSpc>
-            </a:pPr>
-            <a:r>
-              <a:rPr sz="20000" b="0" i="0">
+            <a:ext cx="6400800" cy="2743200"/>
+          </a:xfrm>
+          <a:prstGeom prst="rect">
+            <a:avLst/>
+          </a:prstGeom>
+          <a:noFill/>
+        </p:spPr>
+        <p:txBody>
+          <a:bodyPr wrap="square" lIns="0" rIns="0" tIns="0" bIns="0" anchor="t">
+            <a:spAutoFit/>
+          </a:bodyPr>
+          <a:lstStyle/>
+          <a:p>
+            <a:pPr algn="l">
+              <a:lnSpc>
+                <a:spcPct val="120000"/>
+              </a:lnSpc>
+            </a:pPr>
+            <a:r>
+              <a:rPr sz="18000" b="0" i="0">
                 <a:solidFill>
                   <a:srgbClr val="3DCD58"/>
                 </a:solidFill>
@@ -17168,7 +17168,7 @@
         </p:nvSpPr>
         <p:spPr>
           <a:xfrm>
-            <a:off x="548640" y="3840480"/>
+            <a:off x="548640" y="4023360"/>
             <a:ext cx="10058400" cy="457200"/>
           </a:xfrm>
           <a:prstGeom prst="rect">
@@ -17207,7 +17207,7 @@
         </p:nvSpPr>
         <p:spPr>
           <a:xfrm>
-            <a:off x="548640" y="4206240"/>
+            <a:off x="548640" y="4389120"/>
             <a:ext cx="10058400" cy="914400"/>
           </a:xfrm>
           <a:prstGeom prst="rect">
@@ -19347,26 +19347,26 @@
         <p:spPr>
           <a:xfrm>
             <a:off x="548640" y="914400"/>
-            <a:ext cx="6400800" cy="548640"/>
-          </a:xfrm>
-          <a:prstGeom prst="rect">
-            <a:avLst/>
-          </a:prstGeom>
-          <a:noFill/>
-        </p:spPr>
-        <p:txBody>
-          <a:bodyPr wrap="square" lIns="0" rIns="0" tIns="0" bIns="0" anchor="t">
-            <a:spAutoFit/>
-          </a:bodyPr>
-          <a:lstStyle/>
-          <a:p>
-            <a:pPr algn="l">
-              <a:lnSpc>
-                <a:spcPct val="120000"/>
-              </a:lnSpc>
-            </a:pPr>
-            <a:r>
-              <a:rPr sz="20000" b="0" i="0">
+            <a:ext cx="6400800" cy="2743200"/>
+          </a:xfrm>
+          <a:prstGeom prst="rect">
+            <a:avLst/>
+          </a:prstGeom>
+          <a:noFill/>
+        </p:spPr>
+        <p:txBody>
+          <a:bodyPr wrap="square" lIns="0" rIns="0" tIns="0" bIns="0" anchor="t">
+            <a:spAutoFit/>
+          </a:bodyPr>
+          <a:lstStyle/>
+          <a:p>
+            <a:pPr algn="l">
+              <a:lnSpc>
+                <a:spcPct val="120000"/>
+              </a:lnSpc>
+            </a:pPr>
+            <a:r>
+              <a:rPr sz="18000" b="0" i="0">
                 <a:solidFill>
                   <a:srgbClr val="3DCD58"/>
                 </a:solidFill>
@@ -19385,7 +19385,7 @@
         </p:nvSpPr>
         <p:spPr>
           <a:xfrm>
-            <a:off x="548640" y="3840480"/>
+            <a:off x="548640" y="4023360"/>
             <a:ext cx="10058400" cy="457200"/>
           </a:xfrm>
           <a:prstGeom prst="rect">
@@ -19424,7 +19424,7 @@
         </p:nvSpPr>
         <p:spPr>
           <a:xfrm>
-            <a:off x="548640" y="4206240"/>
+            <a:off x="548640" y="4389120"/>
             <a:ext cx="10058400" cy="914400"/>
           </a:xfrm>
           <a:prstGeom prst="rect">
